--- a/3-Master_Plan/re_entry/HEROs_and_PASSes/slides/auto/CHAR_grandchild_rho_assortativity_AUTO.pptx
+++ b/3-Master_Plan/re_entry/HEROs_and_PASSes/slides/auto/CHAR_grandchild_rho_assortativity_AUTO.pptx
@@ -3114,7 +3114,7 @@
               <a:rPr sz="2000" b="1" i="0" baseline="0">
                 <a:latin typeface="Calibri"/>
               </a:rPr>
-              <a:t>Homophily $\rho$ vs realized assortativity $H_{sort}$ (Grandchild sim)</a:t>
+              <a:t>Homophily $\rho$ vs realized assortativity $H_{sort}$ (LG sim)</a:t>
             </a:r>
           </a:p>
         </p:txBody>
@@ -3145,7 +3145,7 @@
               <a:rPr sz="1000" b="0" i="0" baseline="0">
                 <a:latin typeface="Calibri"/>
               </a:rPr>
-              <a:t>Grandchild ASSIGN · 2015 PPM z · J=402, C=15 · \rho \in [0, 1] · 30 reps/arm</a:t>
+              <a:t>LG ASSIGN · 2015 PPM z · J=402, C=15 · \rho \in [0, 1] · 30 reps/arm</a:t>
             </a:r>
           </a:p>
         </p:txBody>
@@ -3212,7 +3212,7 @@
               <a:rPr sz="1000" b="0" i="0" baseline="0">
                 <a:latin typeface="Calibri"/>
               </a:rPr>
-              <a:t>  \rho = Grandchild ASSIGN homophily knob in \exp(-\rho|\hat{A}_i - \mu_j|).</a:t>
+              <a:t>  \rho = LG ASSIGN homophily knob in \exp(-\rho|\hat{A}_i - \mu_j|).</a:t>
             </a:r>
           </a:p>
           <a:p>
@@ -3232,7 +3232,7 @@
               <a:rPr sz="1000" b="0" i="0" baseline="0">
                 <a:latin typeface="Calibri"/>
               </a:rPr>
-              <a:t>  Each point: mean \pm 1 SD of H_{sort} over stochastic Grandchild realizations.</a:t>
+              <a:t>  Each point: mean \pm 1 SD of H_{sort} over stochastic LG realizations.</a:t>
             </a:r>
           </a:p>
           <a:p>
@@ -3384,7 +3384,7 @@
               <a:rPr sz="1100" b="1" i="0" baseline="0">
                 <a:latin typeface="Calibri"/>
               </a:rPr>
-              <a:t>Claim (Alex): Higher ASSIGN homophily \rho should raise realized assortativity — Grandchild one-shot league on 2015 PPM z shows monotonic H_{sort}(\rho).</a:t>
+              <a:t>Claim (Alex): Higher ASSIGN homophily \rho should raise realized assortativity — LG one-shot league on 2015 PPM z shows monotonic H_{sort}(\rho).</a:t>
             </a:r>
           </a:p>
         </p:txBody>
